--- a/apps/resources/bundled_files/5-klass-ondu-koshuu-kemituu-sabak.pptx
+++ b/apps/resources/bundled_files/5-klass-ondu-koshuu-kemituu-sabak.pptx
@@ -5196,7 +5196,7 @@
                 </a:solidFill>
                 <a:latin typeface="PT Sans"/>
               </a:rPr>
-              <a:t>5-класс · Математика</a:t>
+              <a:t/>
             </a:r>
           </a:p>
         </p:txBody>
@@ -5688,7 +5688,7 @@
                 </a:solidFill>
                 <a:latin typeface="PT Sans"/>
               </a:rPr>
-              <a:t>5-класс ›</a:t>
+              <a:t/>
             </a:r>
           </a:p>
           <a:p>
@@ -6637,7 +6637,7 @@
                 </a:solidFill>
                 <a:latin typeface="PT Sans"/>
               </a:rPr>
-              <a:t>5-класс ›</a:t>
+              <a:t/>
             </a:r>
           </a:p>
           <a:p>
@@ -11485,7 +11485,7 @@
                 </a:solidFill>
                 <a:latin typeface="PT Sans"/>
               </a:rPr>
-              <a:t>5-класс ›</a:t>
+              <a:t/>
             </a:r>
           </a:p>
           <a:p>
@@ -15367,7 +15367,7 @@
                 </a:solidFill>
                 <a:latin typeface="PT Sans"/>
               </a:rPr>
-              <a:t>5-класс ›</a:t>
+              <a:t/>
             </a:r>
           </a:p>
           <a:p>
@@ -16950,7 +16950,7 @@
                 </a:solidFill>
                 <a:latin typeface="PT Sans"/>
               </a:rPr>
-              <a:t>5-класс ›</a:t>
+              <a:t/>
             </a:r>
           </a:p>
           <a:p>
@@ -17779,7 +17779,7 @@
                 </a:solidFill>
                 <a:latin typeface="PT Sans"/>
               </a:rPr>
-              <a:t>5-класс ›</a:t>
+              <a:t/>
             </a:r>
           </a:p>
           <a:p>
@@ -18608,7 +18608,7 @@
                 </a:solidFill>
                 <a:latin typeface="PT Sans"/>
               </a:rPr>
-              <a:t>5-класс ›</a:t>
+              <a:t/>
             </a:r>
           </a:p>
           <a:p>
@@ -20274,7 +20274,7 @@
                 </a:solidFill>
                 <a:latin typeface="PT Sans"/>
               </a:rPr>
-              <a:t>5-класс ›</a:t>
+              <a:t/>
             </a:r>
           </a:p>
           <a:p>
@@ -21358,7 +21358,7 @@
                 </a:solidFill>
                 <a:latin typeface="PT Sans"/>
               </a:rPr>
-              <a:t>5-класс ›</a:t>
+              <a:t/>
             </a:r>
           </a:p>
           <a:p>
@@ -22888,7 +22888,7 @@
                 </a:solidFill>
                 <a:latin typeface="PT Sans"/>
               </a:rPr>
-              <a:t>5-класс ›</a:t>
+              <a:t/>
             </a:r>
           </a:p>
           <a:p>
@@ -24614,7 +24614,7 @@
                 </a:solidFill>
                 <a:latin typeface="PT Sans"/>
               </a:rPr>
-              <a:t>5-класс ›</a:t>
+              <a:t/>
             </a:r>
           </a:p>
           <a:p>
@@ -25891,7 +25891,7 @@
                 </a:solidFill>
                 <a:latin typeface="PT Sans"/>
               </a:rPr>
-              <a:t>5-класс ›</a:t>
+              <a:t/>
             </a:r>
           </a:p>
           <a:p>
@@ -27319,7 +27319,7 @@
                 </a:solidFill>
                 <a:latin typeface="PT Sans"/>
               </a:rPr>
-              <a:t>5-класс ›</a:t>
+              <a:t/>
             </a:r>
           </a:p>
           <a:p>
@@ -28775,7 +28775,7 @@
                 </a:solidFill>
                 <a:latin typeface="PT Sans"/>
               </a:rPr>
-              <a:t>5-класс ›</a:t>
+              <a:t/>
             </a:r>
           </a:p>
           <a:p>
@@ -29939,7 +29939,7 @@
                 </a:solidFill>
                 <a:latin typeface="PT Sans"/>
               </a:rPr>
-              <a:t>5-класс ›</a:t>
+              <a:t/>
             </a:r>
           </a:p>
           <a:p>
@@ -30739,7 +30739,7 @@
                 </a:solidFill>
                 <a:latin typeface="PT Sans"/>
               </a:rPr>
-              <a:t>5-класс ›</a:t>
+              <a:t/>
             </a:r>
           </a:p>
           <a:p>
@@ -31580,7 +31580,7 @@
                 </a:solidFill>
                 <a:latin typeface="PT Sans"/>
               </a:rPr>
-              <a:t>5-класс ›</a:t>
+              <a:t/>
             </a:r>
           </a:p>
           <a:p>
@@ -32529,7 +32529,7 @@
                 </a:solidFill>
                 <a:latin typeface="PT Sans"/>
               </a:rPr>
-              <a:t>5-класс ›</a:t>
+              <a:t/>
             </a:r>
           </a:p>
           <a:p>
@@ -33983,7 +33983,7 @@
                 </a:solidFill>
                 <a:latin typeface="PT Sans"/>
               </a:rPr>
-              <a:t>5-класс ›</a:t>
+              <a:t/>
             </a:r>
           </a:p>
           <a:p>
@@ -34729,7 +34729,7 @@
                 </a:solidFill>
                 <a:latin typeface="PT Sans"/>
               </a:rPr>
-              <a:t>5-класс ›</a:t>
+              <a:t/>
             </a:r>
           </a:p>
           <a:p>
@@ -35537,7 +35537,7 @@
                 </a:solidFill>
                 <a:latin typeface="PT Sans"/>
               </a:rPr>
-              <a:t>5-класс ›</a:t>
+              <a:t/>
             </a:r>
           </a:p>
           <a:p>
@@ -36728,7 +36728,7 @@
                 </a:solidFill>
                 <a:latin typeface="PT Sans"/>
               </a:rPr>
-              <a:t>5-класс ›</a:t>
+              <a:t/>
             </a:r>
           </a:p>
           <a:p>
@@ -37907,7 +37907,7 @@
                 </a:solidFill>
                 <a:latin typeface="PT Sans"/>
               </a:rPr>
-              <a:t>5-класс ›</a:t>
+              <a:t/>
             </a:r>
           </a:p>
           <a:p>
@@ -38088,7 +38088,7 @@
                 </a:solidFill>
                 <a:latin typeface="PT Sans"/>
               </a:rPr>
-              <a:t>4-класс</a:t>
+              <a:t/>
             </a:r>
           </a:p>
         </p:txBody>
@@ -38268,7 +38268,7 @@
                 </a:solidFill>
                 <a:latin typeface="PT Sans"/>
               </a:rPr>
-              <a:t>5-класс</a:t>
+              <a:t/>
             </a:r>
           </a:p>
         </p:txBody>
@@ -38448,7 +38448,7 @@
                 </a:solidFill>
                 <a:latin typeface="PT Sans"/>
               </a:rPr>
-              <a:t>5-класс</a:t>
+              <a:t/>
             </a:r>
           </a:p>
         </p:txBody>
@@ -38684,7 +38684,7 @@
                 </a:solidFill>
                 <a:latin typeface="PT Sans"/>
               </a:rPr>
-              <a:t>6-класс</a:t>
+              <a:t/>
             </a:r>
           </a:p>
         </p:txBody>
@@ -39104,7 +39104,7 @@
                 </a:solidFill>
                 <a:latin typeface="PT Sans"/>
               </a:rPr>
-              <a:t>5-класс ›</a:t>
+              <a:t/>
             </a:r>
           </a:p>
           <a:p>
@@ -40252,7 +40252,7 @@
                 </a:solidFill>
                 <a:latin typeface="PT Sans"/>
               </a:rPr>
-              <a:t>5-класс ›</a:t>
+              <a:t/>
             </a:r>
           </a:p>
           <a:p>

--- a/apps/resources/bundled_files/5-klass-ondu-koshuu-kemituu-sabak.pptx
+++ b/apps/resources/bundled_files/5-klass-ondu-koshuu-kemituu-sabak.pptx
@@ -1582,7 +1582,7 @@
           <a:lstStyle/>
           <a:p>
             <a:r>
-              <a:t>Ой жүгүртүү маданияты (Wenxi Lee, 2.6).</a:t>
+              <a:t>Ой жүгүртүү маданияты (Wenxi Lee, 2,6).</a:t>
             </a:r>
           </a:p>
         </p:txBody>
